--- a/m6/diapositivos/sessao-05-m6-f04.pptx
+++ b/m6/diapositivos/sessao-05-m6-f04.pptx
@@ -1801,7 +1801,7 @@
                 <a:ea typeface="Arial" pitchFamily="34" charset="-122"/>
                 <a:cs typeface="Arial" pitchFamily="34" charset="-120"/>
               </a:rPr>
-              <a:t>Espreita a lição seguinte, «Da Noite Fechada às Horas Mortas»</a:t>
+              <a:t>Espreita a lição seguinte, «Da “Noite Fechada” às “Horas Mortas”»</a:t>
             </a:r>
             <a:endParaRPr lang="en-US" sz="2200" dirty="0"/>
           </a:p>
@@ -2598,7 +2598,143 @@
                 <a:ea typeface="Georgia" pitchFamily="34" charset="-122"/>
                 <a:cs typeface="Georgia" pitchFamily="34" charset="-120"/>
               </a:rPr>
-              <a:t>Uma frase complexa tem várias orações, ligadas por coordenação (independentes: e, mas, ou, pois…) ou subordinação (uma depende da outra: que, quando, se, porque, como…). Em poesia, a ordem pode estar alterada (anástrofe) e há orações sem conector expresso (assíndeto). Primeiro põe a frase em ordem direta; a seguir identifica os predicados (atenção aos tempos compostos: «tinha lido» é um só); por fim procura os conectores.</a:t>
+              <a:t>Uma frase complexa tem várias orações, ligadas por </a:t>
+            </a:r>
+            <a:pPr indent="0" marL="0">
+              <a:lnSpc>
+                <a:spcPct val="120000"/>
+              </a:lnSpc>
+              <a:buNone/>
+            </a:pPr>
+            <a:r>
+              <a:rPr lang="en-US" sz="2300" b="1" dirty="0">
+                <a:solidFill>
+                  <a:srgbClr val="F2F0EA"/>
+                </a:solidFill>
+                <a:latin typeface="Georgia" pitchFamily="34" charset="0"/>
+                <a:ea typeface="Georgia" pitchFamily="34" charset="-122"/>
+                <a:cs typeface="Georgia" pitchFamily="34" charset="-120"/>
+              </a:rPr>
+              <a:t>coordenação</a:t>
+            </a:r>
+            <a:pPr indent="0" marL="0">
+              <a:lnSpc>
+                <a:spcPct val="120000"/>
+              </a:lnSpc>
+              <a:buNone/>
+            </a:pPr>
+            <a:r>
+              <a:rPr lang="en-US" sz="2300" dirty="0">
+                <a:solidFill>
+                  <a:srgbClr val="F2F0EA"/>
+                </a:solidFill>
+                <a:latin typeface="Georgia" pitchFamily="34" charset="0"/>
+                <a:ea typeface="Georgia" pitchFamily="34" charset="-122"/>
+                <a:cs typeface="Georgia" pitchFamily="34" charset="-120"/>
+              </a:rPr>
+              <a:t> (independentes: e, mas, ou, pois…) ou </a:t>
+            </a:r>
+            <a:pPr indent="0" marL="0">
+              <a:lnSpc>
+                <a:spcPct val="120000"/>
+              </a:lnSpc>
+              <a:buNone/>
+            </a:pPr>
+            <a:r>
+              <a:rPr lang="en-US" sz="2300" b="1" dirty="0">
+                <a:solidFill>
+                  <a:srgbClr val="F2F0EA"/>
+                </a:solidFill>
+                <a:latin typeface="Georgia" pitchFamily="34" charset="0"/>
+                <a:ea typeface="Georgia" pitchFamily="34" charset="-122"/>
+                <a:cs typeface="Georgia" pitchFamily="34" charset="-120"/>
+              </a:rPr>
+              <a:t>subordinação</a:t>
+            </a:r>
+            <a:pPr indent="0" marL="0">
+              <a:lnSpc>
+                <a:spcPct val="120000"/>
+              </a:lnSpc>
+              <a:buNone/>
+            </a:pPr>
+            <a:r>
+              <a:rPr lang="en-US" sz="2300" dirty="0">
+                <a:solidFill>
+                  <a:srgbClr val="F2F0EA"/>
+                </a:solidFill>
+                <a:latin typeface="Georgia" pitchFamily="34" charset="0"/>
+                <a:ea typeface="Georgia" pitchFamily="34" charset="-122"/>
+                <a:cs typeface="Georgia" pitchFamily="34" charset="-120"/>
+              </a:rPr>
+              <a:t> (uma depende da outra: que, quando, se, porque, como…). Em poesia, a ordem pode estar alterada (</a:t>
+            </a:r>
+            <a:pPr indent="0" marL="0">
+              <a:lnSpc>
+                <a:spcPct val="120000"/>
+              </a:lnSpc>
+              <a:buNone/>
+            </a:pPr>
+            <a:r>
+              <a:rPr lang="en-US" sz="2300" b="1" dirty="0">
+                <a:solidFill>
+                  <a:srgbClr val="F2F0EA"/>
+                </a:solidFill>
+                <a:latin typeface="Georgia" pitchFamily="34" charset="0"/>
+                <a:ea typeface="Georgia" pitchFamily="34" charset="-122"/>
+                <a:cs typeface="Georgia" pitchFamily="34" charset="-120"/>
+              </a:rPr>
+              <a:t>anástrofe</a:t>
+            </a:r>
+            <a:pPr indent="0" marL="0">
+              <a:lnSpc>
+                <a:spcPct val="120000"/>
+              </a:lnSpc>
+              <a:buNone/>
+            </a:pPr>
+            <a:r>
+              <a:rPr lang="en-US" sz="2300" dirty="0">
+                <a:solidFill>
+                  <a:srgbClr val="F2F0EA"/>
+                </a:solidFill>
+                <a:latin typeface="Georgia" pitchFamily="34" charset="0"/>
+                <a:ea typeface="Georgia" pitchFamily="34" charset="-122"/>
+                <a:cs typeface="Georgia" pitchFamily="34" charset="-120"/>
+              </a:rPr>
+              <a:t>) e há orações sem conector expresso (</a:t>
+            </a:r>
+            <a:pPr indent="0" marL="0">
+              <a:lnSpc>
+                <a:spcPct val="120000"/>
+              </a:lnSpc>
+              <a:buNone/>
+            </a:pPr>
+            <a:r>
+              <a:rPr lang="en-US" sz="2300" b="1" dirty="0">
+                <a:solidFill>
+                  <a:srgbClr val="F2F0EA"/>
+                </a:solidFill>
+                <a:latin typeface="Georgia" pitchFamily="34" charset="0"/>
+                <a:ea typeface="Georgia" pitchFamily="34" charset="-122"/>
+                <a:cs typeface="Georgia" pitchFamily="34" charset="-120"/>
+              </a:rPr>
+              <a:t>assíndeto</a:t>
+            </a:r>
+            <a:pPr indent="0" marL="0">
+              <a:lnSpc>
+                <a:spcPct val="120000"/>
+              </a:lnSpc>
+              <a:buNone/>
+            </a:pPr>
+            <a:r>
+              <a:rPr lang="en-US" sz="2300" dirty="0">
+                <a:solidFill>
+                  <a:srgbClr val="F2F0EA"/>
+                </a:solidFill>
+                <a:latin typeface="Georgia" pitchFamily="34" charset="0"/>
+                <a:ea typeface="Georgia" pitchFamily="34" charset="-122"/>
+                <a:cs typeface="Georgia" pitchFamily="34" charset="-120"/>
+              </a:rPr>
+              <a:t>). Primeiro põe a frase em ordem direta; a seguir identifica os predicados (atenção aos tempos compostos: «tinha lido» é um só); por fim procura os conectores.</a:t>
             </a:r>
             <a:endParaRPr lang="en-US" sz="2300" dirty="0"/>
           </a:p>
@@ -4454,7 +4590,7 @@
               <a:buNone/>
             </a:pPr>
             <a:r>
-              <a:rPr lang="en-US" sz="2300" dirty="0">
+              <a:rPr lang="en-US" sz="2300" b="1" dirty="0">
                 <a:solidFill>
                   <a:srgbClr val="F2F0EA"/>
                 </a:solidFill>
@@ -4462,11 +4598,8 @@
                 <a:ea typeface="Georgia" pitchFamily="34" charset="-122"/>
                 <a:cs typeface="Georgia" pitchFamily="34" charset="-120"/>
               </a:rPr>
-              <a:t>Substantivas: fazem o papel de um nome, quase sempre a completar um verbo («Sonho que sou um cavaleiro»).</a:t>
-            </a:r>
-            <a:endParaRPr lang="en-US" sz="2300" dirty="0"/>
-          </a:p>
-          <a:p>
+              <a:t>Substantivas</a:t>
+            </a:r>
             <a:pPr indent="0" marL="0">
               <a:lnSpc>
                 <a:spcPct val="120000"/>
@@ -4485,7 +4618,7 @@
                 <a:ea typeface="Georgia" pitchFamily="34" charset="-122"/>
                 <a:cs typeface="Georgia" pitchFamily="34" charset="-120"/>
               </a:rPr>
-              <a:t>Teste: trocam-se por «isso».</a:t>
+              <a:t>: fazem o papel de um nome, quase sempre a completar um verbo («Sonho que sou um cavaleiro»).</a:t>
             </a:r>
             <a:endParaRPr lang="en-US" sz="2300" dirty="0"/>
           </a:p>
@@ -4508,11 +4641,8 @@
                 <a:ea typeface="Georgia" pitchFamily="34" charset="-122"/>
                 <a:cs typeface="Georgia" pitchFamily="34" charset="-120"/>
               </a:rPr>
-              <a:t>Adjetivas relativas: dizem alguma coisa de um nome que vem antes («o nome que dê a essa visão»).</a:t>
-            </a:r>
-            <a:endParaRPr lang="en-US" sz="2300" dirty="0"/>
-          </a:p>
-          <a:p>
+              <a:t>Teste: trocam-se por «isso». </a:t>
+            </a:r>
             <a:pPr indent="0" marL="0">
               <a:lnSpc>
                 <a:spcPct val="120000"/>
@@ -4523,7 +4653,7 @@
               <a:buNone/>
             </a:pPr>
             <a:r>
-              <a:rPr lang="en-US" sz="2300" dirty="0">
+              <a:rPr lang="en-US" sz="2300" b="1" dirty="0">
                 <a:solidFill>
                   <a:srgbClr val="F2F0EA"/>
                 </a:solidFill>
@@ -4531,11 +4661,8 @@
                 <a:ea typeface="Georgia" pitchFamily="34" charset="-122"/>
                 <a:cs typeface="Georgia" pitchFamily="34" charset="-120"/>
               </a:rPr>
-              <a:t>Teste: «que» troca-se por «o qual», «a qual».</a:t>
-            </a:r>
-            <a:endParaRPr lang="en-US" sz="2300" dirty="0"/>
-          </a:p>
-          <a:p>
+              <a:t>Adjetivas relativas</a:t>
+            </a:r>
             <a:pPr indent="0" marL="0">
               <a:lnSpc>
                 <a:spcPct val="120000"/>
@@ -4554,7 +4681,70 @@
                 <a:ea typeface="Georgia" pitchFamily="34" charset="-122"/>
                 <a:cs typeface="Georgia" pitchFamily="34" charset="-120"/>
               </a:rPr>
-              <a:t>Adverbiais: dizem o tempo, a causa, a condição, o fim, a consequência («tal melancolia que as sombras despertam…»).</a:t>
+              <a:t>: dizem alguma coisa de um nome que vem antes («o nome que dê a essa visão»).</a:t>
+            </a:r>
+            <a:endParaRPr lang="en-US" sz="2300" dirty="0"/>
+          </a:p>
+          <a:p>
+            <a:pPr indent="0" marL="0">
+              <a:lnSpc>
+                <a:spcPct val="120000"/>
+              </a:lnSpc>
+              <a:spcAft>
+                <a:spcPts val="1000"/>
+              </a:spcAft>
+              <a:buNone/>
+            </a:pPr>
+            <a:r>
+              <a:rPr lang="en-US" sz="2300" dirty="0">
+                <a:solidFill>
+                  <a:srgbClr val="F2F0EA"/>
+                </a:solidFill>
+                <a:latin typeface="Georgia" pitchFamily="34" charset="0"/>
+                <a:ea typeface="Georgia" pitchFamily="34" charset="-122"/>
+                <a:cs typeface="Georgia" pitchFamily="34" charset="-120"/>
+              </a:rPr>
+              <a:t>Teste: «que» troca-se por «o qual», «a qual». </a:t>
+            </a:r>
+            <a:pPr indent="0" marL="0">
+              <a:lnSpc>
+                <a:spcPct val="120000"/>
+              </a:lnSpc>
+              <a:spcAft>
+                <a:spcPts val="1000"/>
+              </a:spcAft>
+              <a:buNone/>
+            </a:pPr>
+            <a:r>
+              <a:rPr lang="en-US" sz="2300" b="1" dirty="0">
+                <a:solidFill>
+                  <a:srgbClr val="F2F0EA"/>
+                </a:solidFill>
+                <a:latin typeface="Georgia" pitchFamily="34" charset="0"/>
+                <a:ea typeface="Georgia" pitchFamily="34" charset="-122"/>
+                <a:cs typeface="Georgia" pitchFamily="34" charset="-120"/>
+              </a:rPr>
+              <a:t>Adverbiais</a:t>
+            </a:r>
+            <a:pPr indent="0" marL="0">
+              <a:lnSpc>
+                <a:spcPct val="120000"/>
+              </a:lnSpc>
+              <a:spcAft>
+                <a:spcPts val="1000"/>
+              </a:spcAft>
+              <a:buNone/>
+            </a:pPr>
+            <a:r>
+              <a:rPr lang="en-US" sz="2300" dirty="0">
+                <a:solidFill>
+                  <a:srgbClr val="F2F0EA"/>
+                </a:solidFill>
+                <a:latin typeface="Georgia" pitchFamily="34" charset="0"/>
+                <a:ea typeface="Georgia" pitchFamily="34" charset="-122"/>
+                <a:cs typeface="Georgia" pitchFamily="34" charset="-120"/>
+              </a:rPr>
+              <a:t>: dizem o tempo, a causa, a condição, o fim, a consequência («tal melancolia que as sombras despertam…»).</a:t>
             </a:r>
             <a:endParaRPr lang="en-US" sz="2300" dirty="0"/>
           </a:p>
